--- a/Bulma_Exposée.pptx
+++ b/Bulma_Exposée.pptx
@@ -3574,7 +3574,7 @@
         <p:spPr>
           <a:xfrm>
             <a:off x="640080" y="1645920"/>
-            <a:ext cx="7772400" cy="3046095"/>
+            <a:ext cx="7772400" cy="3538220"/>
           </a:xfrm>
           <a:prstGeom prst="rect">
             <a:avLst/>
@@ -3718,7 +3718,7 @@
               <a:rPr lang="fr-FR" sz="3200" dirty="0">
                 <a:latin typeface="Agency FB" panose="020B0503020202020204" pitchFamily="34" charset="0"/>
               </a:rPr>
-              <a:t> : créer rapidement des interfaces responsives.</a:t>
+              <a:t> : créer rapidement des sites responsives sans recours aux commandes basiques de CSS.</a:t>
             </a:r>
             <a:endParaRPr lang="fr-FR" sz="3200" dirty="0">
               <a:latin typeface="Agency FB" panose="020B0503020202020204" pitchFamily="34" charset="0"/>
@@ -6518,8 +6518,8 @@
         </p:nvSpPr>
         <p:spPr>
           <a:xfrm>
-            <a:off x="640080" y="1645920"/>
-            <a:ext cx="7772400" cy="5231130"/>
+            <a:off x="640080" y="1235710"/>
+            <a:ext cx="7772400" cy="5395595"/>
           </a:xfrm>
           <a:prstGeom prst="rect">
             <a:avLst/>
@@ -6528,7 +6528,7 @@
         </p:spPr>
         <p:txBody>
           <a:bodyPr wrap="square">
-            <a:spAutoFit/>
+            <a:noAutofit/>
           </a:bodyPr>
           <a:lstStyle/>
           <a:p>
@@ -6741,7 +6741,15 @@
             </a:pPr>
             <a:r>
               <a:rPr lang="en-US" sz="2000" dirty="0"/>
-              <a:t>  &lt;div class="column"&gt;</a:t>
+              <a:t>  &lt;div class="column</a:t>
+            </a:r>
+            <a:r>
+              <a:rPr lang="fr-FR" altLang="en-US" sz="2000" dirty="0"/>
+              <a:t> has-text-centered</a:t>
+            </a:r>
+            <a:r>
+              <a:rPr lang="en-US" sz="2000" dirty="0"/>
+              <a:t>"&gt;</a:t>
             </a:r>
             <a:r>
               <a:rPr lang="en-US" sz="2000" dirty="0" err="1"/>

--- a/Bulma_Exposée.pptx
+++ b/Bulma_Exposée.pptx
@@ -119,7 +119,7 @@
   <p:extLst>
     <p:ext uri="{EFAFB233-063F-42B5-8137-9DF3F51BA10A}">
       <p15:sldGuideLst xmlns:p15="http://schemas.microsoft.com/office/powerpoint/2012/main">
-        <p15:guide id="1" orient="horz" pos="2160" userDrawn="1">
+        <p15:guide id="1" orient="horz" pos="2170" userDrawn="1">
           <p15:clr>
             <a:srgbClr val="A4A3A4"/>
           </p15:clr>
@@ -5161,7 +5161,7 @@
         <p:spPr>
           <a:xfrm>
             <a:off x="640080" y="1379637"/>
-            <a:ext cx="7772400" cy="4955203"/>
+            <a:ext cx="7772400" cy="3538220"/>
           </a:xfrm>
           <a:prstGeom prst="rect">
             <a:avLst/>
@@ -5174,64 +5174,144 @@
           </a:bodyPr>
           <a:lstStyle/>
           <a:p>
-            <a:endParaRPr sz="2800" dirty="0"/>
-          </a:p>
-          <a:p>
-            <a:pPr>
-              <a:defRPr sz="1600">
-                <a:solidFill>
-                  <a:srgbClr val="FFFFFF"/>
-                </a:solidFill>
-              </a:defRPr>
-            </a:pPr>
-            <a:r>
-              <a:rPr lang="fr-FR" sz="3200" dirty="0">
-                <a:latin typeface="Agency FB" panose="020B0503020202020204" pitchFamily="34" charset="0"/>
-              </a:rPr>
-              <a:t>La </a:t>
-            </a:r>
-            <a:r>
-              <a:rPr lang="fr-FR" sz="3200" dirty="0" err="1">
-                <a:latin typeface="Agency FB" panose="020B0503020202020204" pitchFamily="34" charset="0"/>
-              </a:rPr>
-              <a:t>navbar</a:t>
-            </a:r>
-            <a:r>
-              <a:rPr lang="fr-FR" sz="3200" dirty="0">
-                <a:latin typeface="Agency FB" panose="020B0503020202020204" pitchFamily="34" charset="0"/>
-              </a:rPr>
-              <a:t> de </a:t>
-            </a:r>
-            <a:r>
-              <a:rPr lang="fr-FR" sz="3200" dirty="0" err="1">
-                <a:latin typeface="Agency FB" panose="020B0503020202020204" pitchFamily="34" charset="0"/>
-              </a:rPr>
-              <a:t>Bulma</a:t>
-            </a:r>
-            <a:r>
-              <a:rPr lang="fr-FR" sz="3200" dirty="0">
-                <a:latin typeface="Agency FB" panose="020B0503020202020204" pitchFamily="34" charset="0"/>
-              </a:rPr>
-              <a:t> est responsive par défaut.</a:t>
-            </a:r>
             <a:endParaRPr lang="fr-FR" sz="3200" dirty="0">
               <a:latin typeface="Agency FB" panose="020B0503020202020204" pitchFamily="34" charset="0"/>
             </a:endParaRPr>
           </a:p>
           <a:p>
             <a:pPr>
-              <a:defRPr sz="1600">
-                <a:solidFill>
-                  <a:srgbClr val="FFFFFF"/>
-                </a:solidFill>
-              </a:defRPr>
-            </a:pPr>
+              <a:defRPr sz="1800">
+                <a:solidFill>
+                  <a:srgbClr val="DCDCDC"/>
+                </a:solidFill>
+              </a:defRPr>
+            </a:pPr>
+            <a:r>
+              <a:rPr sz="3200" dirty="0">
+                <a:latin typeface="Agency FB" panose="020B0503020202020204" pitchFamily="34" charset="0"/>
+              </a:rPr>
+              <a:t>Structure :</a:t>
+            </a:r>
+            <a:endParaRPr sz="3200" dirty="0">
+              <a:latin typeface="Agency FB" panose="020B0503020202020204" pitchFamily="34" charset="0"/>
+            </a:endParaRPr>
+          </a:p>
+          <a:p>
+            <a:pPr>
+              <a:defRPr sz="1800">
+                <a:solidFill>
+                  <a:srgbClr val="DCDCDC"/>
+                </a:solidFill>
+              </a:defRPr>
+            </a:pPr>
+            <a:r>
+              <a:rPr sz="3200" dirty="0">
+                <a:latin typeface="Agency FB" panose="020B0503020202020204" pitchFamily="34" charset="0"/>
+              </a:rPr>
+              <a:t>.navbar </a:t>
+            </a:r>
             <a:r>
               <a:rPr lang="fr-FR" sz="3200" dirty="0">
                 <a:latin typeface="Agency FB" panose="020B0503020202020204" pitchFamily="34" charset="0"/>
               </a:rPr>
-              <a:t>Elle s’adapte aux écrans mobiles avec un menu burger.</a:t>
-            </a:r>
+              <a:t>            </a:t>
+            </a:r>
+            <a:r>
+              <a:rPr sz="3200" dirty="0">
+                <a:latin typeface="Agency FB" panose="020B0503020202020204" pitchFamily="34" charset="0"/>
+              </a:rPr>
+              <a:t>-&gt;</a:t>
+            </a:r>
+            <a:r>
+              <a:rPr lang="fr-FR" sz="3200" dirty="0">
+                <a:latin typeface="Agency FB" panose="020B0503020202020204" pitchFamily="34" charset="0"/>
+              </a:rPr>
+              <a:t> C</a:t>
+            </a:r>
+            <a:r>
+              <a:rPr sz="3200" dirty="0" err="1">
+                <a:latin typeface="Agency FB" panose="020B0503020202020204" pitchFamily="34" charset="0"/>
+              </a:rPr>
+              <a:t>onteneur</a:t>
+            </a:r>
+            <a:r>
+              <a:rPr sz="3200" dirty="0">
+                <a:latin typeface="Agency FB" panose="020B0503020202020204" pitchFamily="34" charset="0"/>
+              </a:rPr>
+              <a:t> principal</a:t>
+            </a:r>
+            <a:endParaRPr sz="3200" dirty="0">
+              <a:latin typeface="Agency FB" panose="020B0503020202020204" pitchFamily="34" charset="0"/>
+            </a:endParaRPr>
+          </a:p>
+          <a:p>
+            <a:pPr>
+              <a:defRPr sz="1800">
+                <a:solidFill>
+                  <a:srgbClr val="DCDCDC"/>
+                </a:solidFill>
+              </a:defRPr>
+            </a:pPr>
+            <a:r>
+              <a:rPr sz="3200" dirty="0">
+                <a:latin typeface="Agency FB" panose="020B0503020202020204" pitchFamily="34" charset="0"/>
+              </a:rPr>
+              <a:t>.navbar-brand -&gt; </a:t>
+            </a:r>
+            <a:r>
+              <a:rPr lang="fr-FR" sz="3200" dirty="0">
+                <a:latin typeface="Agency FB" panose="020B0503020202020204" pitchFamily="34" charset="0"/>
+              </a:rPr>
+              <a:t>L</a:t>
+            </a:r>
+            <a:r>
+              <a:rPr sz="3200" dirty="0">
+                <a:latin typeface="Agency FB" panose="020B0503020202020204" pitchFamily="34" charset="0"/>
+              </a:rPr>
+              <a:t>ogo</a:t>
+            </a:r>
+            <a:endParaRPr sz="3200" dirty="0">
+              <a:latin typeface="Agency FB" panose="020B0503020202020204" pitchFamily="34" charset="0"/>
+            </a:endParaRPr>
+          </a:p>
+          <a:p>
+            <a:pPr>
+              <a:defRPr sz="1800">
+                <a:solidFill>
+                  <a:srgbClr val="DCDCDC"/>
+                </a:solidFill>
+              </a:defRPr>
+            </a:pPr>
+            <a:r>
+              <a:rPr sz="3200" dirty="0">
+                <a:latin typeface="Agency FB" panose="020B0503020202020204" pitchFamily="34" charset="0"/>
+              </a:rPr>
+              <a:t>.navbar-menu -&gt; </a:t>
+            </a:r>
+            <a:r>
+              <a:rPr lang="fr-FR" sz="3200" dirty="0">
+                <a:latin typeface="Agency FB" panose="020B0503020202020204" pitchFamily="34" charset="0"/>
+              </a:rPr>
+              <a:t>L</a:t>
+            </a:r>
+            <a:r>
+              <a:rPr sz="3200" dirty="0" err="1">
+                <a:latin typeface="Agency FB" panose="020B0503020202020204" pitchFamily="34" charset="0"/>
+              </a:rPr>
+              <a:t>iens</a:t>
+            </a:r>
+            <a:endParaRPr sz="3200" dirty="0">
+              <a:latin typeface="Agency FB" panose="020B0503020202020204" pitchFamily="34" charset="0"/>
+            </a:endParaRPr>
+          </a:p>
+          <a:p>
+            <a:pPr>
+              <a:defRPr sz="1800">
+                <a:solidFill>
+                  <a:srgbClr val="DCDCDC"/>
+                </a:solidFill>
+              </a:defRPr>
+            </a:pPr>
             <a:endParaRPr lang="fr-FR" sz="3200" dirty="0">
               <a:latin typeface="Agency FB" panose="020B0503020202020204" pitchFamily="34" charset="0"/>
             </a:endParaRPr>
@@ -5244,185 +5324,41 @@
                 </a:solidFill>
               </a:defRPr>
             </a:pPr>
-            <a:endParaRPr lang="fr-FR" sz="3200" dirty="0">
-              <a:latin typeface="Agency FB" panose="020B0503020202020204" pitchFamily="34" charset="0"/>
-            </a:endParaRPr>
-          </a:p>
-          <a:p>
-            <a:pPr>
-              <a:defRPr sz="1800">
-                <a:solidFill>
-                  <a:srgbClr val="DCDCDC"/>
-                </a:solidFill>
-              </a:defRPr>
-            </a:pPr>
+            <a:r>
+              <a:rPr sz="3200" dirty="0" err="1">
+                <a:latin typeface="Agency FB" panose="020B0503020202020204" pitchFamily="34" charset="0"/>
+              </a:rPr>
+              <a:t>Comportement</a:t>
+            </a:r>
             <a:r>
               <a:rPr sz="3200" dirty="0">
                 <a:latin typeface="Agency FB" panose="020B0503020202020204" pitchFamily="34" charset="0"/>
               </a:rPr>
-              <a:t>Structure :</a:t>
-            </a:r>
-            <a:endParaRPr sz="3200" dirty="0">
-              <a:latin typeface="Agency FB" panose="020B0503020202020204" pitchFamily="34" charset="0"/>
-            </a:endParaRPr>
-          </a:p>
-          <a:p>
-            <a:pPr>
-              <a:defRPr sz="1800">
-                <a:solidFill>
-                  <a:srgbClr val="DCDCDC"/>
-                </a:solidFill>
-              </a:defRPr>
-            </a:pPr>
+              <a:t> </a:t>
+            </a:r>
+            <a:r>
+              <a:rPr sz="3200" dirty="0" err="1">
+                <a:latin typeface="Agency FB" panose="020B0503020202020204" pitchFamily="34" charset="0"/>
+              </a:rPr>
+              <a:t>géré</a:t>
+            </a:r>
             <a:r>
               <a:rPr sz="3200" dirty="0">
                 <a:latin typeface="Agency FB" panose="020B0503020202020204" pitchFamily="34" charset="0"/>
               </a:rPr>
-              <a:t>.navbar </a:t>
-            </a:r>
-            <a:r>
-              <a:rPr lang="fr-FR" sz="3200" dirty="0">
-                <a:latin typeface="Agency FB" panose="020B0503020202020204" pitchFamily="34" charset="0"/>
-              </a:rPr>
-              <a:t>            </a:t>
-            </a:r>
-            <a:r>
-              <a:rPr sz="3200" dirty="0">
-                <a:latin typeface="Agency FB" panose="020B0503020202020204" pitchFamily="34" charset="0"/>
-              </a:rPr>
-              <a:t>-&gt;</a:t>
-            </a:r>
-            <a:r>
-              <a:rPr lang="fr-FR" sz="3200" dirty="0">
-                <a:latin typeface="Agency FB" panose="020B0503020202020204" pitchFamily="34" charset="0"/>
-              </a:rPr>
-              <a:t> C</a:t>
+              <a:t> via JS </a:t>
             </a:r>
             <a:r>
               <a:rPr sz="3200" dirty="0" err="1">
                 <a:latin typeface="Agency FB" panose="020B0503020202020204" pitchFamily="34" charset="0"/>
               </a:rPr>
-              <a:t>onteneur</a:t>
-            </a:r>
-            <a:r>
-              <a:rPr sz="3200" dirty="0">
-                <a:latin typeface="Agency FB" panose="020B0503020202020204" pitchFamily="34" charset="0"/>
-              </a:rPr>
-              <a:t> principal</a:t>
-            </a:r>
-            <a:endParaRPr sz="3200" dirty="0">
-              <a:latin typeface="Agency FB" panose="020B0503020202020204" pitchFamily="34" charset="0"/>
-            </a:endParaRPr>
-          </a:p>
-          <a:p>
-            <a:pPr>
-              <a:defRPr sz="1800">
-                <a:solidFill>
-                  <a:srgbClr val="DCDCDC"/>
-                </a:solidFill>
-              </a:defRPr>
-            </a:pPr>
-            <a:r>
-              <a:rPr sz="3200" dirty="0">
-                <a:latin typeface="Agency FB" panose="020B0503020202020204" pitchFamily="34" charset="0"/>
-              </a:rPr>
-              <a:t>.navbar-brand -&gt; </a:t>
-            </a:r>
-            <a:r>
-              <a:rPr lang="fr-FR" sz="3200" dirty="0">
-                <a:latin typeface="Agency FB" panose="020B0503020202020204" pitchFamily="34" charset="0"/>
-              </a:rPr>
-              <a:t>L</a:t>
-            </a:r>
-            <a:r>
-              <a:rPr sz="3200" dirty="0">
-                <a:latin typeface="Agency FB" panose="020B0503020202020204" pitchFamily="34" charset="0"/>
-              </a:rPr>
-              <a:t>ogo</a:t>
-            </a:r>
-            <a:endParaRPr sz="3200" dirty="0">
-              <a:latin typeface="Agency FB" panose="020B0503020202020204" pitchFamily="34" charset="0"/>
-            </a:endParaRPr>
-          </a:p>
-          <a:p>
-            <a:pPr>
-              <a:defRPr sz="1800">
-                <a:solidFill>
-                  <a:srgbClr val="DCDCDC"/>
-                </a:solidFill>
-              </a:defRPr>
-            </a:pPr>
-            <a:r>
-              <a:rPr sz="3200" dirty="0">
-                <a:latin typeface="Agency FB" panose="020B0503020202020204" pitchFamily="34" charset="0"/>
-              </a:rPr>
-              <a:t>.navbar-menu -&gt; </a:t>
-            </a:r>
-            <a:r>
-              <a:rPr lang="fr-FR" sz="3200" dirty="0">
-                <a:latin typeface="Agency FB" panose="020B0503020202020204" pitchFamily="34" charset="0"/>
-              </a:rPr>
-              <a:t>L</a:t>
-            </a:r>
-            <a:r>
-              <a:rPr sz="3200" dirty="0" err="1">
-                <a:latin typeface="Agency FB" panose="020B0503020202020204" pitchFamily="34" charset="0"/>
-              </a:rPr>
-              <a:t>iens</a:t>
-            </a:r>
-            <a:endParaRPr sz="3200" dirty="0">
-              <a:latin typeface="Agency FB" panose="020B0503020202020204" pitchFamily="34" charset="0"/>
-            </a:endParaRPr>
-          </a:p>
-          <a:p>
-            <a:pPr>
-              <a:defRPr sz="1800">
-                <a:solidFill>
-                  <a:srgbClr val="DCDCDC"/>
-                </a:solidFill>
-              </a:defRPr>
-            </a:pPr>
-            <a:endParaRPr lang="fr-FR" sz="3200" dirty="0">
-              <a:latin typeface="Agency FB" panose="020B0503020202020204" pitchFamily="34" charset="0"/>
-            </a:endParaRPr>
-          </a:p>
-          <a:p>
-            <a:pPr>
-              <a:defRPr sz="1800">
-                <a:solidFill>
-                  <a:srgbClr val="DCDCDC"/>
-                </a:solidFill>
-              </a:defRPr>
-            </a:pPr>
-            <a:r>
-              <a:rPr sz="3200" dirty="0" err="1">
-                <a:latin typeface="Agency FB" panose="020B0503020202020204" pitchFamily="34" charset="0"/>
-              </a:rPr>
-              <a:t>Comportement</a:t>
-            </a:r>
-            <a:r>
-              <a:rPr sz="3200" dirty="0">
-                <a:latin typeface="Agency FB" panose="020B0503020202020204" pitchFamily="34" charset="0"/>
-              </a:rPr>
-              <a:t> </a:t>
-            </a:r>
-            <a:r>
-              <a:rPr sz="3200" dirty="0" err="1">
-                <a:latin typeface="Agency FB" panose="020B0503020202020204" pitchFamily="34" charset="0"/>
-              </a:rPr>
-              <a:t>géré</a:t>
-            </a:r>
-            <a:r>
-              <a:rPr sz="3200" dirty="0">
-                <a:latin typeface="Agency FB" panose="020B0503020202020204" pitchFamily="34" charset="0"/>
-              </a:rPr>
-              <a:t> via JS </a:t>
-            </a:r>
-            <a:r>
-              <a:rPr sz="3200" dirty="0" err="1">
-                <a:latin typeface="Agency FB" panose="020B0503020202020204" pitchFamily="34" charset="0"/>
-              </a:rPr>
               <a:t>personnalisé</a:t>
+            </a:r>
+            <a:r>
+              <a:rPr lang="fr-FR" sz="3200" dirty="0" err="1">
+                <a:latin typeface="Agency FB" panose="020B0503020202020204" pitchFamily="34" charset="0"/>
+              </a:rPr>
+              <a:t> (Burger)</a:t>
             </a:r>
             <a:r>
               <a:rPr sz="3200" dirty="0">
@@ -7003,8 +6939,8 @@
         </p:nvSpPr>
         <p:spPr>
           <a:xfrm>
-            <a:off x="519430" y="3727450"/>
-            <a:ext cx="8105140" cy="3015615"/>
+            <a:off x="386715" y="1161415"/>
+            <a:ext cx="8105140" cy="4863465"/>
           </a:xfrm>
           <a:prstGeom prst="rect">
             <a:avLst/>
@@ -7019,14 +6955,14 @@
           </a:bodyPr>
           <a:p>
             <a:r>
-              <a:rPr lang="en-US" altLang="fr-FR" sz="1350">
+              <a:rPr lang="en-US" altLang="fr-FR" sz="2400">
                 <a:solidFill>
                   <a:srgbClr val="92D050"/>
                 </a:solidFill>
               </a:rPr>
               <a:t>&lt;div class="field"&gt;</a:t>
             </a:r>
-            <a:endParaRPr lang="en-US" altLang="fr-FR" sz="1350">
+            <a:endParaRPr lang="en-US" altLang="fr-FR" sz="2400">
               <a:solidFill>
                 <a:srgbClr val="92D050"/>
               </a:solidFill>
@@ -7034,14 +6970,14 @@
           </a:p>
           <a:p>
             <a:r>
-              <a:rPr lang="en-US" altLang="fr-FR" sz="1350">
+              <a:rPr lang="en-US" altLang="fr-FR" sz="2400">
                 <a:solidFill>
                   <a:srgbClr val="92D050"/>
                 </a:solidFill>
               </a:rPr>
               <a:t>  &lt;label class="label"&gt;Name&lt;/label&gt;</a:t>
             </a:r>
-            <a:endParaRPr lang="en-US" altLang="fr-FR" sz="1350">
+            <a:endParaRPr lang="en-US" altLang="fr-FR" sz="2400">
               <a:solidFill>
                 <a:srgbClr val="92D050"/>
               </a:solidFill>
@@ -7049,14 +6985,14 @@
           </a:p>
           <a:p>
             <a:r>
-              <a:rPr lang="en-US" altLang="fr-FR" sz="1350">
+              <a:rPr lang="en-US" altLang="fr-FR" sz="2400">
                 <a:solidFill>
                   <a:srgbClr val="92D050"/>
                 </a:solidFill>
               </a:rPr>
               <a:t>  &lt;div class="control"&gt;</a:t>
             </a:r>
-            <a:endParaRPr lang="en-US" altLang="fr-FR" sz="1350">
+            <a:endParaRPr lang="en-US" altLang="fr-FR" sz="2400">
               <a:solidFill>
                 <a:srgbClr val="92D050"/>
               </a:solidFill>
@@ -7064,14 +7000,14 @@
           </a:p>
           <a:p>
             <a:r>
-              <a:rPr lang="en-US" altLang="fr-FR" sz="1350">
+              <a:rPr lang="en-US" altLang="fr-FR" sz="2400">
                 <a:solidFill>
                   <a:srgbClr val="92D050"/>
                 </a:solidFill>
               </a:rPr>
               <a:t>    &lt;input class="input" type="text" placeholder="Text input"&gt;</a:t>
             </a:r>
-            <a:endParaRPr lang="en-US" altLang="fr-FR" sz="1350">
+            <a:endParaRPr lang="en-US" altLang="fr-FR" sz="2400">
               <a:solidFill>
                 <a:srgbClr val="92D050"/>
               </a:solidFill>
@@ -7079,14 +7015,14 @@
           </a:p>
           <a:p>
             <a:r>
-              <a:rPr lang="en-US" altLang="fr-FR" sz="1350">
+              <a:rPr lang="en-US" altLang="fr-FR" sz="2400">
                 <a:solidFill>
                   <a:srgbClr val="92D050"/>
                 </a:solidFill>
               </a:rPr>
               <a:t>  &lt;/div&gt;</a:t>
             </a:r>
-            <a:endParaRPr lang="en-US" altLang="fr-FR" sz="1350">
+            <a:endParaRPr lang="en-US" altLang="fr-FR" sz="2400">
               <a:solidFill>
                 <a:srgbClr val="92D050"/>
               </a:solidFill>
@@ -7094,14 +7030,14 @@
           </a:p>
           <a:p>
             <a:r>
-              <a:rPr lang="en-US" altLang="fr-FR" sz="1350">
+              <a:rPr lang="en-US" altLang="fr-FR" sz="2400">
                 <a:solidFill>
                   <a:srgbClr val="92D050"/>
                 </a:solidFill>
               </a:rPr>
               <a:t>&lt;/div&gt;</a:t>
             </a:r>
-            <a:endParaRPr lang="en-US" altLang="fr-FR" sz="1350">
+            <a:endParaRPr lang="en-US" altLang="fr-FR" sz="2400">
               <a:solidFill>
                 <a:srgbClr val="92D050"/>
               </a:solidFill>
@@ -7109,14 +7045,14 @@
           </a:p>
           <a:p>
             <a:r>
-              <a:rPr lang="en-US" altLang="fr-FR" sz="1350">
+              <a:rPr lang="en-US" altLang="fr-FR" sz="2400">
                 <a:solidFill>
                   <a:srgbClr val="92D050"/>
                 </a:solidFill>
               </a:rPr>
               <a:t>&lt;div class="field is-grouped"&gt;</a:t>
             </a:r>
-            <a:endParaRPr lang="en-US" altLang="fr-FR" sz="1350">
+            <a:endParaRPr lang="en-US" altLang="fr-FR" sz="2400">
               <a:solidFill>
                 <a:srgbClr val="92D050"/>
               </a:solidFill>
@@ -7124,14 +7060,14 @@
           </a:p>
           <a:p>
             <a:r>
-              <a:rPr lang="en-US" altLang="fr-FR" sz="1350">
+              <a:rPr lang="en-US" altLang="fr-FR" sz="2400">
                 <a:solidFill>
                   <a:srgbClr val="92D050"/>
                 </a:solidFill>
               </a:rPr>
               <a:t>  &lt;div class="control"&gt;</a:t>
             </a:r>
-            <a:endParaRPr lang="en-US" altLang="fr-FR" sz="1350">
+            <a:endParaRPr lang="en-US" altLang="fr-FR" sz="2400">
               <a:solidFill>
                 <a:srgbClr val="92D050"/>
               </a:solidFill>
@@ -7139,14 +7075,14 @@
           </a:p>
           <a:p>
             <a:r>
-              <a:rPr lang="en-US" altLang="fr-FR" sz="1350">
+              <a:rPr lang="en-US" altLang="fr-FR" sz="2400">
                 <a:solidFill>
                   <a:srgbClr val="92D050"/>
                 </a:solidFill>
               </a:rPr>
               <a:t>    &lt;button class="button is-link"&gt;Submit&lt;/button&gt;</a:t>
             </a:r>
-            <a:endParaRPr lang="en-US" altLang="fr-FR" sz="1350">
+            <a:endParaRPr lang="en-US" altLang="fr-FR" sz="2400">
               <a:solidFill>
                 <a:srgbClr val="92D050"/>
               </a:solidFill>
@@ -7154,14 +7090,14 @@
           </a:p>
           <a:p>
             <a:r>
-              <a:rPr lang="en-US" altLang="fr-FR" sz="1350">
+              <a:rPr lang="en-US" altLang="fr-FR" sz="2400">
                 <a:solidFill>
                   <a:srgbClr val="92D050"/>
                 </a:solidFill>
               </a:rPr>
               <a:t>  &lt;/div&gt;</a:t>
             </a:r>
-            <a:endParaRPr lang="en-US" altLang="fr-FR" sz="1350">
+            <a:endParaRPr lang="en-US" altLang="fr-FR" sz="2400">
               <a:solidFill>
                 <a:srgbClr val="92D050"/>
               </a:solidFill>
@@ -7169,14 +7105,14 @@
           </a:p>
           <a:p>
             <a:r>
-              <a:rPr lang="en-US" altLang="fr-FR" sz="1350">
+              <a:rPr lang="en-US" altLang="fr-FR" sz="2400">
                 <a:solidFill>
                   <a:srgbClr val="92D050"/>
                 </a:solidFill>
               </a:rPr>
               <a:t>  &lt;div class="control"&gt;</a:t>
             </a:r>
-            <a:endParaRPr lang="en-US" altLang="fr-FR" sz="1350">
+            <a:endParaRPr lang="en-US" altLang="fr-FR" sz="2400">
               <a:solidFill>
                 <a:srgbClr val="92D050"/>
               </a:solidFill>
@@ -7184,14 +7120,14 @@
           </a:p>
           <a:p>
             <a:r>
-              <a:rPr lang="en-US" altLang="fr-FR" sz="1350">
+              <a:rPr lang="en-US" altLang="fr-FR" sz="2400">
                 <a:solidFill>
                   <a:srgbClr val="92D050"/>
                 </a:solidFill>
               </a:rPr>
               <a:t>    &lt;button class="button is-link is-light"&gt;Cancel&lt;/button&gt;</a:t>
             </a:r>
-            <a:endParaRPr lang="en-US" altLang="fr-FR" sz="1350">
+            <a:endParaRPr lang="en-US" altLang="fr-FR" sz="2400">
               <a:solidFill>
                 <a:srgbClr val="92D050"/>
               </a:solidFill>
@@ -7199,14 +7135,14 @@
           </a:p>
           <a:p>
             <a:r>
-              <a:rPr lang="en-US" altLang="fr-FR" sz="1350">
+              <a:rPr lang="en-US" altLang="fr-FR" sz="2400">
                 <a:solidFill>
                   <a:srgbClr val="92D050"/>
                 </a:solidFill>
               </a:rPr>
               <a:t>  &lt;/div&gt;</a:t>
             </a:r>
-            <a:endParaRPr lang="en-US" altLang="fr-FR" sz="1350">
+            <a:endParaRPr lang="en-US" altLang="fr-FR" sz="2400">
               <a:solidFill>
                 <a:srgbClr val="92D050"/>
               </a:solidFill>
@@ -7214,434 +7150,17 @@
           </a:p>
           <a:p>
             <a:r>
-              <a:rPr lang="en-US" altLang="fr-FR" sz="1350">
+              <a:rPr lang="en-US" altLang="fr-FR" sz="2400">
                 <a:solidFill>
                   <a:srgbClr val="92D050"/>
                 </a:solidFill>
               </a:rPr>
               <a:t>&lt;/div&gt;</a:t>
             </a:r>
-            <a:endParaRPr lang="en-US" altLang="fr-FR" sz="1350">
+            <a:endParaRPr lang="en-US" altLang="fr-FR" sz="2400">
               <a:solidFill>
                 <a:srgbClr val="92D050"/>
               </a:solidFill>
-            </a:endParaRPr>
-          </a:p>
-        </p:txBody>
-      </p:sp>
-      <p:sp>
-        <p:nvSpPr>
-          <p:cNvPr id="7" name="TextBox 2"/>
-          <p:cNvSpPr txBox="1"/>
-          <p:nvPr/>
-        </p:nvSpPr>
-        <p:spPr>
-          <a:xfrm>
-            <a:off x="519430" y="866775"/>
-            <a:ext cx="10006965" cy="1598295"/>
-          </a:xfrm>
-          <a:prstGeom prst="rect">
-            <a:avLst/>
-          </a:prstGeom>
-          <a:noFill/>
-        </p:spPr>
-        <p:txBody>
-          <a:bodyPr wrap="none">
-            <a:noAutofit/>
-          </a:bodyPr>
-          <a:lstStyle/>
-          <a:p>
-            <a:pPr algn="l">
-              <a:defRPr sz="3200" b="1">
-                <a:solidFill>
-                  <a:srgbClr val="00B4FF"/>
-                </a:solidFill>
-              </a:defRPr>
-            </a:pPr>
-            <a:r>
-              <a:rPr lang="fr-FR" sz="2000" b="0" dirty="0">
-                <a:solidFill>
-                  <a:schemeClr val="bg1"/>
-                </a:solidFill>
-                <a:latin typeface="Agency FB" panose="020B0503020202020204" pitchFamily="34" charset="0"/>
-                <a:cs typeface="Agency FB" panose="020B0503020202020204" pitchFamily="34" charset="0"/>
-              </a:rPr>
-              <a:t>C’est un champ où l’utilisateur peut saisir et envoyer des informations</a:t>
-            </a:r>
-            <a:endParaRPr lang="fr-FR" sz="2000" b="0" dirty="0">
-              <a:solidFill>
-                <a:schemeClr val="bg1"/>
-              </a:solidFill>
-              <a:latin typeface="Agency FB" panose="020B0503020202020204" pitchFamily="34" charset="0"/>
-              <a:cs typeface="Agency FB" panose="020B0503020202020204" pitchFamily="34" charset="0"/>
-            </a:endParaRPr>
-          </a:p>
-          <a:p>
-            <a:pPr algn="l">
-              <a:defRPr sz="3200" b="1">
-                <a:solidFill>
-                  <a:srgbClr val="00B4FF"/>
-                </a:solidFill>
-              </a:defRPr>
-            </a:pPr>
-            <a:r>
-              <a:rPr lang="fr-FR" sz="2000" dirty="0">
-                <a:solidFill>
-                  <a:schemeClr val="bg1"/>
-                </a:solidFill>
-                <a:latin typeface="Agency FB" panose="020B0503020202020204" pitchFamily="34" charset="0"/>
-                <a:cs typeface="Agency FB" panose="020B0503020202020204" pitchFamily="34" charset="0"/>
-              </a:rPr>
-              <a:t>Avantages : </a:t>
-            </a:r>
-            <a:endParaRPr lang="fr-FR" sz="2000" dirty="0">
-              <a:solidFill>
-                <a:schemeClr val="bg1"/>
-              </a:solidFill>
-              <a:latin typeface="Agency FB" panose="020B0503020202020204" pitchFamily="34" charset="0"/>
-              <a:cs typeface="Agency FB" panose="020B0503020202020204" pitchFamily="34" charset="0"/>
-            </a:endParaRPr>
-          </a:p>
-          <a:p>
-            <a:pPr algn="l">
-              <a:defRPr sz="3200" b="1">
-                <a:solidFill>
-                  <a:srgbClr val="00B4FF"/>
-                </a:solidFill>
-              </a:defRPr>
-            </a:pPr>
-            <a:r>
-              <a:rPr lang="en-US" altLang="fr-FR" sz="2000" u="sng" dirty="0">
-                <a:solidFill>
-                  <a:schemeClr val="bg1"/>
-                </a:solidFill>
-                <a:latin typeface="Agency FB" panose="020B0503020202020204" pitchFamily="34" charset="0"/>
-                <a:cs typeface="Agency FB" panose="020B0503020202020204" pitchFamily="34" charset="0"/>
-              </a:rPr>
-              <a:t>Rapide et simple</a:t>
-            </a:r>
-            <a:r>
-              <a:rPr lang="en-US" altLang="fr-FR" sz="2000" dirty="0">
-                <a:solidFill>
-                  <a:schemeClr val="bg1"/>
-                </a:solidFill>
-                <a:latin typeface="Agency FB" panose="020B0503020202020204" pitchFamily="34" charset="0"/>
-                <a:cs typeface="Agency FB" panose="020B0503020202020204" pitchFamily="34" charset="0"/>
-              </a:rPr>
-              <a:t> : </a:t>
-            </a:r>
-            <a:r>
-              <a:rPr lang="en-US" altLang="fr-FR" sz="2000" b="0" dirty="0">
-                <a:solidFill>
-                  <a:schemeClr val="bg1"/>
-                </a:solidFill>
-                <a:latin typeface="Agency FB" panose="020B0503020202020204" pitchFamily="34" charset="0"/>
-                <a:cs typeface="Agency FB" panose="020B0503020202020204" pitchFamily="34" charset="0"/>
-              </a:rPr>
-              <a:t>classes CSS pr</a:t>
-            </a:r>
-            <a:r>
-              <a:rPr lang="en-US" altLang="en-US" sz="2000" b="0" dirty="0">
-                <a:solidFill>
-                  <a:schemeClr val="bg1"/>
-                </a:solidFill>
-                <a:latin typeface="Agency FB" panose="020B0503020202020204" pitchFamily="34" charset="0"/>
-                <a:cs typeface="Agency FB" panose="020B0503020202020204" pitchFamily="34" charset="0"/>
-              </a:rPr>
-              <a:t>ê</a:t>
-            </a:r>
-            <a:r>
-              <a:rPr lang="en-US" altLang="fr-FR" sz="2000" b="0" dirty="0">
-                <a:solidFill>
-                  <a:schemeClr val="bg1"/>
-                </a:solidFill>
-                <a:latin typeface="Agency FB" panose="020B0503020202020204" pitchFamily="34" charset="0"/>
-                <a:cs typeface="Agency FB" panose="020B0503020202020204" pitchFamily="34" charset="0"/>
-              </a:rPr>
-              <a:t>tes à l’emploi.</a:t>
-            </a:r>
-            <a:endParaRPr lang="en-US" altLang="fr-FR" sz="2000" b="0" dirty="0">
-              <a:solidFill>
-                <a:schemeClr val="bg1"/>
-              </a:solidFill>
-              <a:latin typeface="Agency FB" panose="020B0503020202020204" pitchFamily="34" charset="0"/>
-              <a:cs typeface="Agency FB" panose="020B0503020202020204" pitchFamily="34" charset="0"/>
-            </a:endParaRPr>
-          </a:p>
-          <a:p>
-            <a:pPr algn="l">
-              <a:defRPr sz="3200" b="1">
-                <a:solidFill>
-                  <a:srgbClr val="00B4FF"/>
-                </a:solidFill>
-              </a:defRPr>
-            </a:pPr>
-            <a:r>
-              <a:rPr lang="en-US" altLang="fr-FR" sz="2000" u="sng" dirty="0">
-                <a:solidFill>
-                  <a:schemeClr val="bg1"/>
-                </a:solidFill>
-                <a:latin typeface="Agency FB" panose="020B0503020202020204" pitchFamily="34" charset="0"/>
-                <a:cs typeface="Agency FB" panose="020B0503020202020204" pitchFamily="34" charset="0"/>
-              </a:rPr>
-              <a:t>Responsive</a:t>
-            </a:r>
-            <a:r>
-              <a:rPr lang="en-US" altLang="fr-FR" sz="2000" dirty="0">
-                <a:solidFill>
-                  <a:schemeClr val="bg1"/>
-                </a:solidFill>
-                <a:latin typeface="Agency FB" panose="020B0503020202020204" pitchFamily="34" charset="0"/>
-                <a:cs typeface="Agency FB" panose="020B0503020202020204" pitchFamily="34" charset="0"/>
-              </a:rPr>
-              <a:t> : </a:t>
-            </a:r>
-            <a:r>
-              <a:rPr lang="en-US" altLang="fr-FR" sz="2000" b="0" dirty="0">
-                <a:solidFill>
-                  <a:schemeClr val="bg1"/>
-                </a:solidFill>
-                <a:latin typeface="Agency FB" panose="020B0503020202020204" pitchFamily="34" charset="0"/>
-                <a:cs typeface="Agency FB" panose="020B0503020202020204" pitchFamily="34" charset="0"/>
-              </a:rPr>
-              <a:t>s’adapte automatiquement aux </a:t>
-            </a:r>
-            <a:r>
-              <a:rPr lang="en-US" altLang="en-US" sz="2000" b="0" dirty="0">
-                <a:solidFill>
-                  <a:schemeClr val="bg1"/>
-                </a:solidFill>
-                <a:latin typeface="Agency FB" panose="020B0503020202020204" pitchFamily="34" charset="0"/>
-                <a:cs typeface="Agency FB" panose="020B0503020202020204" pitchFamily="34" charset="0"/>
-              </a:rPr>
-              <a:t>é</a:t>
-            </a:r>
-            <a:r>
-              <a:rPr lang="en-US" altLang="fr-FR" sz="2000" b="0" dirty="0">
-                <a:solidFill>
-                  <a:schemeClr val="bg1"/>
-                </a:solidFill>
-                <a:latin typeface="Agency FB" panose="020B0503020202020204" pitchFamily="34" charset="0"/>
-                <a:cs typeface="Agency FB" panose="020B0503020202020204" pitchFamily="34" charset="0"/>
-              </a:rPr>
-              <a:t>crans.</a:t>
-            </a:r>
-            <a:endParaRPr lang="en-US" altLang="fr-FR" sz="2000" b="0" dirty="0">
-              <a:solidFill>
-                <a:schemeClr val="bg1"/>
-              </a:solidFill>
-              <a:latin typeface="Agency FB" panose="020B0503020202020204" pitchFamily="34" charset="0"/>
-              <a:cs typeface="Agency FB" panose="020B0503020202020204" pitchFamily="34" charset="0"/>
-            </a:endParaRPr>
-          </a:p>
-          <a:p>
-            <a:pPr algn="l">
-              <a:defRPr sz="3200" b="1">
-                <a:solidFill>
-                  <a:srgbClr val="00B4FF"/>
-                </a:solidFill>
-              </a:defRPr>
-            </a:pPr>
-            <a:r>
-              <a:rPr lang="en-US" altLang="fr-FR" sz="2000" u="sng" dirty="0">
-                <a:solidFill>
-                  <a:schemeClr val="bg1"/>
-                </a:solidFill>
-                <a:latin typeface="Agency FB" panose="020B0503020202020204" pitchFamily="34" charset="0"/>
-                <a:cs typeface="Agency FB" panose="020B0503020202020204" pitchFamily="34" charset="0"/>
-              </a:rPr>
-              <a:t>Design coh</a:t>
-            </a:r>
-            <a:r>
-              <a:rPr lang="en-US" altLang="en-US" sz="2000" u="sng" dirty="0">
-                <a:solidFill>
-                  <a:schemeClr val="bg1"/>
-                </a:solidFill>
-                <a:latin typeface="Agency FB" panose="020B0503020202020204" pitchFamily="34" charset="0"/>
-                <a:cs typeface="Agency FB" panose="020B0503020202020204" pitchFamily="34" charset="0"/>
-              </a:rPr>
-              <a:t>é</a:t>
-            </a:r>
-            <a:r>
-              <a:rPr lang="en-US" altLang="fr-FR" sz="2000" u="sng" dirty="0">
-                <a:solidFill>
-                  <a:schemeClr val="bg1"/>
-                </a:solidFill>
-                <a:latin typeface="Agency FB" panose="020B0503020202020204" pitchFamily="34" charset="0"/>
-                <a:cs typeface="Agency FB" panose="020B0503020202020204" pitchFamily="34" charset="0"/>
-              </a:rPr>
-              <a:t>rent</a:t>
-            </a:r>
-            <a:r>
-              <a:rPr lang="en-US" altLang="fr-FR" sz="2000" dirty="0">
-                <a:solidFill>
-                  <a:schemeClr val="bg1"/>
-                </a:solidFill>
-                <a:latin typeface="Agency FB" panose="020B0503020202020204" pitchFamily="34" charset="0"/>
-                <a:cs typeface="Agency FB" panose="020B0503020202020204" pitchFamily="34" charset="0"/>
-              </a:rPr>
-              <a:t> : </a:t>
-            </a:r>
-            <a:r>
-              <a:rPr lang="en-US" altLang="fr-FR" sz="2000" b="0" dirty="0">
-                <a:solidFill>
-                  <a:schemeClr val="bg1"/>
-                </a:solidFill>
-                <a:latin typeface="Agency FB" panose="020B0503020202020204" pitchFamily="34" charset="0"/>
-                <a:cs typeface="Agency FB" panose="020B0503020202020204" pitchFamily="34" charset="0"/>
-              </a:rPr>
-              <a:t>champs, boutons et messages uniformes.</a:t>
-            </a:r>
-            <a:endParaRPr lang="en-US" altLang="fr-FR" sz="2000" b="0" dirty="0">
-              <a:solidFill>
-                <a:schemeClr val="bg1"/>
-              </a:solidFill>
-              <a:latin typeface="Agency FB" panose="020B0503020202020204" pitchFamily="34" charset="0"/>
-              <a:cs typeface="Agency FB" panose="020B0503020202020204" pitchFamily="34" charset="0"/>
-            </a:endParaRPr>
-          </a:p>
-          <a:p>
-            <a:pPr algn="l">
-              <a:defRPr sz="3200" b="1">
-                <a:solidFill>
-                  <a:srgbClr val="00B4FF"/>
-                </a:solidFill>
-              </a:defRPr>
-            </a:pPr>
-            <a:r>
-              <a:rPr lang="en-US" altLang="fr-FR" sz="2000" u="sng" dirty="0">
-                <a:solidFill>
-                  <a:schemeClr val="bg1"/>
-                </a:solidFill>
-                <a:latin typeface="Agency FB" panose="020B0503020202020204" pitchFamily="34" charset="0"/>
-                <a:cs typeface="Agency FB" panose="020B0503020202020204" pitchFamily="34" charset="0"/>
-              </a:rPr>
-              <a:t>Flexible</a:t>
-            </a:r>
-            <a:r>
-              <a:rPr lang="en-US" altLang="fr-FR" sz="2000" dirty="0">
-                <a:solidFill>
-                  <a:schemeClr val="bg1"/>
-                </a:solidFill>
-                <a:latin typeface="Agency FB" panose="020B0503020202020204" pitchFamily="34" charset="0"/>
-                <a:cs typeface="Agency FB" panose="020B0503020202020204" pitchFamily="34" charset="0"/>
-              </a:rPr>
-              <a:t> : </a:t>
-            </a:r>
-            <a:r>
-              <a:rPr lang="en-US" altLang="fr-FR" sz="2000" b="0" dirty="0">
-                <a:solidFill>
-                  <a:schemeClr val="bg1"/>
-                </a:solidFill>
-                <a:latin typeface="Agency FB" panose="020B0503020202020204" pitchFamily="34" charset="0"/>
-                <a:cs typeface="Agency FB" panose="020B0503020202020204" pitchFamily="34" charset="0"/>
-              </a:rPr>
-              <a:t>compatible avec Flexbox pour alignements faciles.</a:t>
-            </a:r>
-            <a:endParaRPr lang="en-US" altLang="fr-FR" sz="2000" b="0" dirty="0">
-              <a:solidFill>
-                <a:schemeClr val="bg1"/>
-              </a:solidFill>
-              <a:latin typeface="Agency FB" panose="020B0503020202020204" pitchFamily="34" charset="0"/>
-              <a:cs typeface="Agency FB" panose="020B0503020202020204" pitchFamily="34" charset="0"/>
-            </a:endParaRPr>
-          </a:p>
-          <a:p>
-            <a:pPr algn="l">
-              <a:defRPr sz="3200" b="1">
-                <a:solidFill>
-                  <a:srgbClr val="00B4FF"/>
-                </a:solidFill>
-              </a:defRPr>
-            </a:pPr>
-            <a:r>
-              <a:rPr lang="en-US" altLang="fr-FR" sz="2000" u="sng" dirty="0">
-                <a:solidFill>
-                  <a:schemeClr val="bg1"/>
-                </a:solidFill>
-                <a:latin typeface="Agency FB" panose="020B0503020202020204" pitchFamily="34" charset="0"/>
-                <a:cs typeface="Agency FB" panose="020B0503020202020204" pitchFamily="34" charset="0"/>
-              </a:rPr>
-              <a:t>L</a:t>
-            </a:r>
-            <a:r>
-              <a:rPr lang="en-US" altLang="en-US" sz="2000" u="sng" dirty="0">
-                <a:solidFill>
-                  <a:schemeClr val="bg1"/>
-                </a:solidFill>
-                <a:latin typeface="Agency FB" panose="020B0503020202020204" pitchFamily="34" charset="0"/>
-                <a:cs typeface="Agency FB" panose="020B0503020202020204" pitchFamily="34" charset="0"/>
-              </a:rPr>
-              <a:t>é</a:t>
-            </a:r>
-            <a:r>
-              <a:rPr lang="en-US" altLang="fr-FR" sz="2000" u="sng" dirty="0">
-                <a:solidFill>
-                  <a:schemeClr val="bg1"/>
-                </a:solidFill>
-                <a:latin typeface="Agency FB" panose="020B0503020202020204" pitchFamily="34" charset="0"/>
-                <a:cs typeface="Agency FB" panose="020B0503020202020204" pitchFamily="34" charset="0"/>
-              </a:rPr>
-              <a:t>ger</a:t>
-            </a:r>
-            <a:r>
-              <a:rPr lang="en-US" altLang="fr-FR" sz="2000" b="0" dirty="0">
-                <a:solidFill>
-                  <a:schemeClr val="bg1"/>
-                </a:solidFill>
-                <a:latin typeface="Agency FB" panose="020B0503020202020204" pitchFamily="34" charset="0"/>
-                <a:cs typeface="Agency FB" panose="020B0503020202020204" pitchFamily="34" charset="0"/>
-              </a:rPr>
-              <a:t> : CSS pur, pas besoin de JavaScript.</a:t>
-            </a:r>
-            <a:endParaRPr lang="en-US" altLang="fr-FR" sz="2000" b="0" dirty="0">
-              <a:solidFill>
-                <a:schemeClr val="bg1"/>
-              </a:solidFill>
-              <a:latin typeface="Agency FB" panose="020B0503020202020204" pitchFamily="34" charset="0"/>
-              <a:cs typeface="Agency FB" panose="020B0503020202020204" pitchFamily="34" charset="0"/>
-            </a:endParaRPr>
-          </a:p>
-          <a:p>
-            <a:pPr algn="l">
-              <a:defRPr sz="3200" b="1">
-                <a:solidFill>
-                  <a:srgbClr val="00B4FF"/>
-                </a:solidFill>
-              </a:defRPr>
-            </a:pPr>
-            <a:endParaRPr lang="en-US" altLang="fr-FR" sz="2000" dirty="0">
-              <a:solidFill>
-                <a:schemeClr val="bg1"/>
-              </a:solidFill>
-              <a:latin typeface="Agency FB" panose="020B0503020202020204" pitchFamily="34" charset="0"/>
-              <a:cs typeface="Agency FB" panose="020B0503020202020204" pitchFamily="34" charset="0"/>
-            </a:endParaRPr>
-          </a:p>
-          <a:p>
-            <a:pPr algn="l">
-              <a:defRPr sz="3200" b="1">
-                <a:solidFill>
-                  <a:srgbClr val="00B4FF"/>
-                </a:solidFill>
-              </a:defRPr>
-            </a:pPr>
-            <a:r>
-              <a:rPr lang="fr-FR" sz="2000" dirty="0">
-                <a:solidFill>
-                  <a:schemeClr val="bg1"/>
-                </a:solidFill>
-                <a:latin typeface="Agency FB" panose="020B0503020202020204" pitchFamily="34" charset="0"/>
-                <a:cs typeface="Agency FB" panose="020B0503020202020204" pitchFamily="34" charset="0"/>
-              </a:rPr>
-              <a:t>Exemple : </a:t>
-            </a:r>
-            <a:endParaRPr lang="fr-FR" sz="2000" dirty="0">
-              <a:solidFill>
-                <a:schemeClr val="bg1"/>
-              </a:solidFill>
-              <a:latin typeface="Agency FB" panose="020B0503020202020204" pitchFamily="34" charset="0"/>
-              <a:cs typeface="Agency FB" panose="020B0503020202020204" pitchFamily="34" charset="0"/>
             </a:endParaRPr>
           </a:p>
         </p:txBody>
@@ -7774,8 +7293,8 @@
         </p:nvSpPr>
         <p:spPr>
           <a:xfrm>
-            <a:off x="640080" y="676502"/>
-            <a:ext cx="7772400" cy="6186309"/>
+            <a:off x="640080" y="1490345"/>
+            <a:ext cx="7772400" cy="3391535"/>
           </a:xfrm>
           <a:prstGeom prst="rect">
             <a:avLst/>
@@ -7784,225 +7303,11 @@
         </p:spPr>
         <p:txBody>
           <a:bodyPr wrap="square">
-            <a:spAutoFit/>
+            <a:noAutofit/>
           </a:bodyPr>
           <a:lstStyle/>
           <a:p>
             <a:endParaRPr dirty="0"/>
-          </a:p>
-          <a:p>
-            <a:r>
-              <a:rPr lang="fr-FR" sz="2000" dirty="0">
-                <a:solidFill>
-                  <a:schemeClr val="bg1"/>
-                </a:solidFill>
-                <a:latin typeface="Agency FB" panose="020B0503020202020204" pitchFamily="34" charset="0"/>
-              </a:rPr>
-              <a:t>Le </a:t>
-            </a:r>
-            <a:r>
-              <a:rPr lang="fr-FR" sz="2000" dirty="0" err="1">
-                <a:solidFill>
-                  <a:schemeClr val="bg1"/>
-                </a:solidFill>
-                <a:latin typeface="Agency FB" panose="020B0503020202020204" pitchFamily="34" charset="0"/>
-              </a:rPr>
-              <a:t>footer</a:t>
-            </a:r>
-            <a:r>
-              <a:rPr lang="fr-FR" sz="2000" dirty="0">
-                <a:solidFill>
-                  <a:schemeClr val="bg1"/>
-                </a:solidFill>
-                <a:latin typeface="Agency FB" panose="020B0503020202020204" pitchFamily="34" charset="0"/>
-              </a:rPr>
-              <a:t> est la </a:t>
-            </a:r>
-            <a:r>
-              <a:rPr lang="fr-FR" sz="2000" b="0" dirty="0">
-                <a:solidFill>
-                  <a:schemeClr val="bg1"/>
-                </a:solidFill>
-                <a:latin typeface="Agency FB" panose="020B0503020202020204" pitchFamily="34" charset="0"/>
-              </a:rPr>
-              <a:t>Zone de bas de page</a:t>
-            </a:r>
-            <a:br>
-              <a:rPr lang="fr-FR" sz="2000" dirty="0">
-                <a:solidFill>
-                  <a:schemeClr val="bg1"/>
-                </a:solidFill>
-                <a:latin typeface="Agency FB" panose="020B0503020202020204" pitchFamily="34" charset="0"/>
-              </a:rPr>
-            </a:br>
-            <a:endParaRPr lang="fr-FR" sz="2000" dirty="0">
-              <a:solidFill>
-                <a:schemeClr val="bg1"/>
-              </a:solidFill>
-              <a:latin typeface="Agency FB" panose="020B0503020202020204" pitchFamily="34" charset="0"/>
-            </a:endParaRPr>
-          </a:p>
-          <a:p>
-            <a:r>
-              <a:rPr lang="fr-FR" sz="2000" dirty="0">
-                <a:solidFill>
-                  <a:schemeClr val="bg1"/>
-                </a:solidFill>
-                <a:latin typeface="Agency FB" panose="020B0503020202020204" pitchFamily="34" charset="0"/>
-              </a:rPr>
-              <a:t>Il affiche les informations importantes :</a:t>
-            </a:r>
-            <a:endParaRPr lang="fr-FR" sz="2000" dirty="0">
-              <a:solidFill>
-                <a:schemeClr val="bg1"/>
-              </a:solidFill>
-              <a:latin typeface="Agency FB" panose="020B0503020202020204" pitchFamily="34" charset="0"/>
-            </a:endParaRPr>
-          </a:p>
-          <a:p>
-            <a:r>
-              <a:rPr lang="fr-FR" sz="2000" dirty="0">
-                <a:solidFill>
-                  <a:schemeClr val="bg1"/>
-                </a:solidFill>
-                <a:latin typeface="Agency FB" panose="020B0503020202020204" pitchFamily="34" charset="0"/>
-              </a:rPr>
-              <a:t>• Mentions légales</a:t>
-            </a:r>
-            <a:br>
-              <a:rPr lang="fr-FR" sz="2000" dirty="0">
-                <a:solidFill>
-                  <a:schemeClr val="bg1"/>
-                </a:solidFill>
-                <a:latin typeface="Agency FB" panose="020B0503020202020204" pitchFamily="34" charset="0"/>
-              </a:rPr>
-            </a:br>
-            <a:r>
-              <a:rPr lang="fr-FR" sz="2000" dirty="0">
-                <a:solidFill>
-                  <a:schemeClr val="bg1"/>
-                </a:solidFill>
-                <a:latin typeface="Agency FB" panose="020B0503020202020204" pitchFamily="34" charset="0"/>
-              </a:rPr>
-              <a:t>• Contact</a:t>
-            </a:r>
-            <a:br>
-              <a:rPr lang="fr-FR" sz="2000" dirty="0">
-                <a:solidFill>
-                  <a:schemeClr val="bg1"/>
-                </a:solidFill>
-                <a:latin typeface="Agency FB" panose="020B0503020202020204" pitchFamily="34" charset="0"/>
-              </a:rPr>
-            </a:br>
-            <a:r>
-              <a:rPr lang="fr-FR" sz="2000" dirty="0">
-                <a:solidFill>
-                  <a:schemeClr val="bg1"/>
-                </a:solidFill>
-                <a:latin typeface="Agency FB" panose="020B0503020202020204" pitchFamily="34" charset="0"/>
-              </a:rPr>
-              <a:t>• Copyright</a:t>
-            </a:r>
-            <a:endParaRPr lang="fr-FR" sz="2000" dirty="0">
-              <a:solidFill>
-                <a:schemeClr val="bg1"/>
-              </a:solidFill>
-              <a:latin typeface="Agency FB" panose="020B0503020202020204" pitchFamily="34" charset="0"/>
-            </a:endParaRPr>
-          </a:p>
-          <a:p>
-            <a:endParaRPr lang="fr-FR" sz="2000" dirty="0">
-              <a:solidFill>
-                <a:schemeClr val="bg1"/>
-              </a:solidFill>
-              <a:latin typeface="Agency FB" panose="020B0503020202020204" pitchFamily="34" charset="0"/>
-            </a:endParaRPr>
-          </a:p>
-          <a:p>
-            <a:r>
-              <a:rPr lang="fr-FR" sz="2000" dirty="0">
-                <a:solidFill>
-                  <a:schemeClr val="bg1"/>
-                </a:solidFill>
-                <a:latin typeface="Agency FB" panose="020B0503020202020204" pitchFamily="34" charset="0"/>
-              </a:rPr>
-              <a:t>✅ Simple</a:t>
-            </a:r>
-            <a:br>
-              <a:rPr lang="fr-FR" sz="2000" dirty="0">
-                <a:solidFill>
-                  <a:schemeClr val="bg1"/>
-                </a:solidFill>
-                <a:latin typeface="Agency FB" panose="020B0503020202020204" pitchFamily="34" charset="0"/>
-              </a:rPr>
-            </a:br>
-            <a:r>
-              <a:rPr lang="fr-FR" sz="2000" dirty="0">
-                <a:solidFill>
-                  <a:schemeClr val="bg1"/>
-                </a:solidFill>
-                <a:latin typeface="Agency FB" panose="020B0503020202020204" pitchFamily="34" charset="0"/>
-              </a:rPr>
-              <a:t>✅ Responsive</a:t>
-            </a:r>
-            <a:br>
-              <a:rPr lang="fr-FR" sz="2000" dirty="0">
-                <a:solidFill>
-                  <a:schemeClr val="bg1"/>
-                </a:solidFill>
-                <a:latin typeface="Agency FB" panose="020B0503020202020204" pitchFamily="34" charset="0"/>
-              </a:rPr>
-            </a:br>
-            <a:r>
-              <a:rPr lang="fr-FR" sz="2000" dirty="0">
-                <a:solidFill>
-                  <a:schemeClr val="bg1"/>
-                </a:solidFill>
-                <a:latin typeface="Agency FB" panose="020B0503020202020204" pitchFamily="34" charset="0"/>
-              </a:rPr>
-              <a:t>✅ Personnalisable</a:t>
-            </a:r>
-            <a:endParaRPr lang="fr-FR" sz="2000" dirty="0">
-              <a:solidFill>
-                <a:schemeClr val="bg1"/>
-              </a:solidFill>
-              <a:latin typeface="Agency FB" panose="020B0503020202020204" pitchFamily="34" charset="0"/>
-            </a:endParaRPr>
-          </a:p>
-          <a:p>
-            <a:endParaRPr lang="fr-FR" sz="2000" dirty="0">
-              <a:solidFill>
-                <a:schemeClr val="bg1"/>
-              </a:solidFill>
-              <a:latin typeface="Agency FB" panose="020B0503020202020204" pitchFamily="34" charset="0"/>
-            </a:endParaRPr>
-          </a:p>
-          <a:p>
-            <a:r>
-              <a:rPr lang="fr-FR" sz="2000" dirty="0">
-                <a:solidFill>
-                  <a:schemeClr val="bg1"/>
-                </a:solidFill>
-                <a:latin typeface="Agency FB" panose="020B0503020202020204" pitchFamily="34" charset="0"/>
-              </a:rPr>
-              <a:t>Renforce la structure et la crédibilité du site.</a:t>
-            </a:r>
-            <a:endParaRPr lang="fr-FR" sz="2000" dirty="0">
-              <a:solidFill>
-                <a:schemeClr val="bg1"/>
-              </a:solidFill>
-              <a:latin typeface="Agency FB" panose="020B0503020202020204" pitchFamily="34" charset="0"/>
-            </a:endParaRPr>
-          </a:p>
-          <a:p>
-            <a:pPr>
-              <a:defRPr sz="1800">
-                <a:solidFill>
-                  <a:srgbClr val="DCDCDC"/>
-                </a:solidFill>
-              </a:defRPr>
-            </a:pPr>
-            <a:endParaRPr lang="fr-FR" dirty="0"/>
           </a:p>
           <a:p>
             <a:pPr>
@@ -8049,10 +7354,10 @@
               </a:defRPr>
             </a:pPr>
             <a:r>
-              <a:rPr lang="en-US" dirty="0"/>
+              <a:rPr lang="en-US" sz="2400" dirty="0"/>
               <a:t>&lt;footer class="footer"&gt;</a:t>
             </a:r>
-            <a:endParaRPr lang="en-US" dirty="0"/>
+            <a:endParaRPr lang="en-US" sz="2400" dirty="0"/>
           </a:p>
           <a:p>
             <a:pPr>
@@ -8064,10 +7369,10 @@
               </a:defRPr>
             </a:pPr>
             <a:r>
-              <a:rPr lang="en-US" dirty="0"/>
+              <a:rPr lang="en-US" sz="2400" dirty="0"/>
               <a:t>  &lt;div class="content has-text-centered"&gt;</a:t>
             </a:r>
-            <a:endParaRPr lang="en-US" dirty="0"/>
+            <a:endParaRPr lang="en-US" sz="2400" dirty="0"/>
           </a:p>
           <a:p>
             <a:pPr>
@@ -8079,18 +7384,18 @@
               </a:defRPr>
             </a:pPr>
             <a:r>
-              <a:rPr lang="en-US" dirty="0"/>
+              <a:rPr lang="en-US" sz="2400" dirty="0"/>
               <a:t>    &lt;p&gt;© 2025 - Mon site </a:t>
             </a:r>
             <a:r>
-              <a:rPr lang="en-US" dirty="0" err="1"/>
+              <a:rPr lang="en-US" sz="2400" dirty="0" err="1"/>
               <a:t>Bulma</a:t>
             </a:r>
             <a:r>
-              <a:rPr lang="en-US" dirty="0"/>
+              <a:rPr lang="en-US" sz="2400" dirty="0"/>
               <a:t>&lt;/p&gt;</a:t>
             </a:r>
-            <a:endParaRPr lang="en-US" dirty="0"/>
+            <a:endParaRPr lang="en-US" sz="2400" dirty="0"/>
           </a:p>
           <a:p>
             <a:pPr>
@@ -8102,10 +7407,10 @@
               </a:defRPr>
             </a:pPr>
             <a:r>
-              <a:rPr lang="en-US" dirty="0"/>
+              <a:rPr lang="en-US" sz="2400" dirty="0"/>
               <a:t>  &lt;/div&gt;</a:t>
             </a:r>
-            <a:endParaRPr lang="en-US" dirty="0"/>
+            <a:endParaRPr lang="en-US" sz="2400" dirty="0"/>
           </a:p>
           <a:p>
             <a:pPr>
@@ -8117,10 +7422,10 @@
               </a:defRPr>
             </a:pPr>
             <a:r>
-              <a:rPr lang="en-US" dirty="0"/>
+              <a:rPr lang="en-US" sz="2400" dirty="0"/>
               <a:t>&lt;/footer&gt;</a:t>
             </a:r>
-            <a:endParaRPr lang="en-US" dirty="0"/>
+            <a:endParaRPr lang="en-US" sz="2400" dirty="0"/>
           </a:p>
         </p:txBody>
       </p:sp>
